--- a/Insurance_Capstone.pptx
+++ b/Insurance_Capstone.pptx
@@ -1809,7 +1809,7 @@
         </p:nvSpPr>
         <p:spPr>
           <a:xfrm>
-            <a:off x="160020" y="4389550"/>
+            <a:off x="160020" y="4352544"/>
             <a:ext cx="3657600" cy="411480"/>
           </a:xfrm>
           <a:prstGeom prst="rect">
@@ -5613,7 +5613,7 @@
         </p:blipFill>
         <p:spPr>
           <a:xfrm>
-            <a:off x="3706837" y="944294"/>
+            <a:off x="3706837" y="610218"/>
             <a:ext cx="1463040" cy="1463040"/>
           </a:xfrm>
           <a:prstGeom prst="rect">
@@ -5629,7 +5629,7 @@
         </p:nvSpPr>
         <p:spPr>
           <a:xfrm>
-            <a:off x="541606" y="2846950"/>
+            <a:off x="496728" y="2379294"/>
             <a:ext cx="8229600" cy="594360"/>
           </a:xfrm>
           <a:prstGeom prst="rect">
@@ -5722,6 +5722,239 @@
               <a:t>.NET 9  •  Angular 19  •  SQL Server  •  QuestPDF  •  Vercel Blob  •  SignalR  •  JWT Auth</a:t>
             </a:r>
             <a:endParaRPr lang="en-US" sz="1000" dirty="0"/>
+          </a:p>
+        </p:txBody>
+      </p:sp>
+      <p:sp>
+        <p:nvSpPr>
+          <p:cNvPr id="2" name="Rectangle 1"/>
+          <p:cNvSpPr/>
+          <p:nvPr/>
+        </p:nvSpPr>
+        <p:spPr>
+          <a:xfrm>
+            <a:off x="453339" y="3240421"/>
+            <a:ext cx="8237319" cy="1200329"/>
+          </a:xfrm>
+          <a:prstGeom prst="rect">
+            <a:avLst/>
+          </a:prstGeom>
+        </p:spPr>
+        <p:txBody>
+          <a:bodyPr wrap="none">
+            <a:spAutoFit/>
+          </a:bodyPr>
+          <a:lstStyle/>
+          <a:p>
+            <a:pPr algn="ctr"/>
+            <a:r>
+              <a:rPr lang="en-US" dirty="0">
+                <a:solidFill>
+                  <a:schemeClr val="bg1"/>
+                </a:solidFill>
+              </a:rPr>
+              <a:t>I</a:t>
+            </a:r>
+            <a:r>
+              <a:rPr lang="en-US" dirty="0" smtClean="0">
+                <a:solidFill>
+                  <a:schemeClr val="bg1"/>
+                </a:solidFill>
+              </a:rPr>
+              <a:t> </a:t>
+            </a:r>
+            <a:r>
+              <a:rPr lang="en-US" dirty="0">
+                <a:solidFill>
+                  <a:schemeClr val="bg1"/>
+                </a:solidFill>
+              </a:rPr>
+              <a:t>would like to express </a:t>
+            </a:r>
+            <a:r>
+              <a:rPr lang="en-US" dirty="0" smtClean="0">
+                <a:solidFill>
+                  <a:schemeClr val="bg1"/>
+                </a:solidFill>
+              </a:rPr>
+              <a:t>my sincere </a:t>
+            </a:r>
+            <a:r>
+              <a:rPr lang="en-US" dirty="0">
+                <a:solidFill>
+                  <a:schemeClr val="bg1"/>
+                </a:solidFill>
+              </a:rPr>
+              <a:t>gratitude to </a:t>
+            </a:r>
+            <a:r>
+              <a:rPr lang="en-US" b="1" dirty="0" smtClean="0">
+                <a:solidFill>
+                  <a:schemeClr val="bg1"/>
+                </a:solidFill>
+              </a:rPr>
+              <a:t>The</a:t>
+            </a:r>
+            <a:r>
+              <a:rPr lang="en-US" dirty="0" smtClean="0">
+                <a:solidFill>
+                  <a:schemeClr val="bg1"/>
+                </a:solidFill>
+              </a:rPr>
+              <a:t> </a:t>
+            </a:r>
+            <a:r>
+              <a:rPr lang="en-US" b="1" dirty="0" smtClean="0">
+                <a:solidFill>
+                  <a:schemeClr val="bg1"/>
+                </a:solidFill>
+              </a:rPr>
+              <a:t>Hartford India , </a:t>
+            </a:r>
+            <a:r>
+              <a:rPr lang="en-US" b="1" dirty="0">
+                <a:solidFill>
+                  <a:schemeClr val="bg1"/>
+                </a:solidFill>
+              </a:rPr>
+              <a:t>GUVI, </a:t>
+            </a:r>
+            <a:r>
+              <a:rPr lang="en-US" b="1" dirty="0" smtClean="0">
+                <a:solidFill>
+                  <a:schemeClr val="bg1"/>
+                </a:solidFill>
+              </a:rPr>
+              <a:t>Surya, </a:t>
+            </a:r>
+          </a:p>
+          <a:p>
+            <a:pPr algn="ctr"/>
+            <a:r>
+              <a:rPr lang="en-US" b="1" dirty="0" smtClean="0">
+                <a:solidFill>
+                  <a:schemeClr val="bg1"/>
+                </a:solidFill>
+              </a:rPr>
+              <a:t>Ranjan </a:t>
+            </a:r>
+            <a:r>
+              <a:rPr lang="en-US" b="1" dirty="0">
+                <a:solidFill>
+                  <a:schemeClr val="bg1"/>
+                </a:solidFill>
+              </a:rPr>
+              <a:t>Bhatnagar, </a:t>
+            </a:r>
+            <a:r>
+              <a:rPr lang="en-US" b="1" dirty="0" smtClean="0">
+                <a:solidFill>
+                  <a:schemeClr val="bg1"/>
+                </a:solidFill>
+              </a:rPr>
+              <a:t>and </a:t>
+            </a:r>
+            <a:r>
+              <a:rPr lang="en-US" b="1" dirty="0">
+                <a:solidFill>
+                  <a:schemeClr val="bg1"/>
+                </a:solidFill>
+              </a:rPr>
+              <a:t>Koti</a:t>
+            </a:r>
+            <a:r>
+              <a:rPr lang="en-US" dirty="0">
+                <a:solidFill>
+                  <a:schemeClr val="bg1"/>
+                </a:solidFill>
+              </a:rPr>
+              <a:t> </a:t>
+            </a:r>
+            <a:r>
+              <a:rPr lang="en-US" dirty="0" smtClean="0">
+                <a:solidFill>
+                  <a:schemeClr val="bg1"/>
+                </a:solidFill>
+              </a:rPr>
+              <a:t>for </a:t>
+            </a:r>
+            <a:r>
+              <a:rPr lang="en-US" dirty="0">
+                <a:solidFill>
+                  <a:schemeClr val="bg1"/>
+                </a:solidFill>
+              </a:rPr>
+              <a:t>their valuable support, guidance, and encouragement </a:t>
+            </a:r>
+            <a:endParaRPr lang="en-US" dirty="0" smtClean="0">
+              <a:solidFill>
+                <a:schemeClr val="bg1"/>
+              </a:solidFill>
+            </a:endParaRPr>
+          </a:p>
+          <a:p>
+            <a:pPr algn="ctr"/>
+            <a:r>
+              <a:rPr lang="en-US" dirty="0" smtClean="0">
+                <a:solidFill>
+                  <a:schemeClr val="bg1"/>
+                </a:solidFill>
+              </a:rPr>
+              <a:t>throughout the training and development of </a:t>
+            </a:r>
+            <a:r>
+              <a:rPr lang="en-US" dirty="0">
+                <a:solidFill>
+                  <a:schemeClr val="bg1"/>
+                </a:solidFill>
+              </a:rPr>
+              <a:t>this project. Their insights and resources </a:t>
+            </a:r>
+            <a:endParaRPr lang="en-US" dirty="0" smtClean="0">
+              <a:solidFill>
+                <a:schemeClr val="bg1"/>
+              </a:solidFill>
+            </a:endParaRPr>
+          </a:p>
+          <a:p>
+            <a:pPr algn="ctr"/>
+            <a:r>
+              <a:rPr lang="en-US" dirty="0" smtClean="0">
+                <a:solidFill>
+                  <a:schemeClr val="bg1"/>
+                </a:solidFill>
+              </a:rPr>
+              <a:t>greatly contributed </a:t>
+            </a:r>
+            <a:r>
+              <a:rPr lang="en-US" dirty="0">
+                <a:solidFill>
+                  <a:schemeClr val="bg1"/>
+                </a:solidFill>
+              </a:rPr>
+              <a:t>to the successful completion of </a:t>
+            </a:r>
+            <a:r>
+              <a:rPr lang="en-US" dirty="0" smtClean="0">
+                <a:solidFill>
+                  <a:schemeClr val="bg1"/>
+                </a:solidFill>
+              </a:rPr>
+              <a:t>my work</a:t>
+            </a:r>
+            <a:r>
+              <a:rPr lang="en-US" dirty="0">
+                <a:solidFill>
+                  <a:schemeClr val="bg1"/>
+                </a:solidFill>
+              </a:rPr>
+              <a:t>. </a:t>
+            </a:r>
+            <a:endParaRPr lang="en-US" dirty="0">
+              <a:solidFill>
+                <a:schemeClr val="bg1"/>
+              </a:solidFill>
+            </a:endParaRPr>
           </a:p>
         </p:txBody>
       </p:sp>
